--- a/docs/lectures/lecture_04/04_lecture_powerpoint.pptx
+++ b/docs/lectures/lecture_04/04_lecture_powerpoint.pptx
@@ -3303,7 +3303,7 @@
             </a:pPr>
             <a:r>
               <a:rPr/>
-              <a:t>Lecture 04: T-Tests</a:t>
+              <a:t>Lecture 04 — Testing Our Hypothesis</a:t>
             </a:r>
           </a:p>
         </p:txBody>
@@ -3331,6 +3331,12 @@
             <a:pPr lvl="0" indent="0" marL="0">
               <a:buNone/>
             </a:pPr>
+            <a:r>
+              <a:rPr/>
+              <a:t>The two-sample Welch’s t-test from assumptions to results</a:t>
+            </a:r>
+            <a:br/>
+            <a:br/>
             <a:r>
               <a:rPr/>
               <a:t>Bill Perry</a:t>
@@ -3443,7 +3449,7 @@
                 </a:solidFill>
                 <a:latin typeface="Courier"/>
               </a:rPr>
-              <a:t># Pull stats from the data and compute t by hand --------</a:t>
+              <a:t># Pull stats and compute t by hand ----------------------</a:t>
             </a:r>
             <a:br/>
             <a:r>
@@ -5003,45 +5009,8 @@
                   <a:buNone/>
                 </a:pPr>
                 <a:r>
-                  <a:rPr b="1"/>
-                  <a:t>The t-statistic tells us:</a:t>
-                </a:r>
-                <a:r>
                   <a:rPr/>
-                  <a:t> the observed difference is ~10 standard errors above zero — very far from what we’d expect if H₀ were true.</a:t>
-                </a:r>
-              </a:p>
-              <a:p>
-                <a:pPr lvl="0" indent="0" marL="0">
-                  <a:buNone/>
-                </a:pPr>
-                <a:r>
-                  <a:rPr/>
-                  <a:t>We compare this to the </a:t>
-                </a:r>
-                <a:r>
-                  <a:rPr b="1"/>
-                  <a:t>t-distribution</a:t>
-                </a:r>
-                <a:r>
-                  <a:rPr/>
-                  <a:t> with Welch-Satterthwaite </a:t>
-                </a:r>
-                <a:r>
-                  <a:rPr i="1"/>
-                  <a:t>df</a:t>
-                </a:r>
-                <a:r>
-                  <a:rPr/>
-                  <a:t> to get the </a:t>
-                </a:r>
-                <a:r>
-                  <a:rPr i="1"/>
-                  <a:t>p</a:t>
-                </a:r>
-                <a:r>
-                  <a:rPr/>
-                  <a:t>-value.</a:t>
+                  <a:t>The observed difference is ~10 standard errors above zero — very far from what we’d expect if H₀ were true.</a:t>
                 </a:r>
               </a:p>
             </p:txBody>
@@ -8030,21 +7999,6 @@
               <a:t> — it rarely detects non-normality even when present. The QQ plot is equally important.</a:t>
             </a:r>
           </a:p>
-          <a:p>
-            <a:pPr lvl="0" indent="0" marL="0">
-              <a:buNone/>
-            </a:pPr>
-            <a:r>
-              <a:rPr/>
-              <a:t>📖 </a:t>
-            </a:r>
-            <a:r>
-              <a:rPr>
-                <a:hlinkClick r:id="rId2"/>
-              </a:rPr>
-              <a:t>Data Carpentry</a:t>
-            </a:r>
-          </a:p>
         </p:txBody>
       </p:sp>
     </p:spTree>
@@ -8742,7 +8696,7 @@
                       </a:pPr>
                       <a:r>
                         <a:rPr/>
-                        <a:t>formula: compare </a:t>
+                        <a:t>compare </a:t>
                       </a:r>
                       <a:r>
                         <a:rPr>
@@ -8856,7 +8810,7 @@
             </a:pPr>
             <a:r>
               <a:rPr/>
-              <a:t>The result is a model object. We will decode each line of the output on the next slide.</a:t>
+              <a:t>The result is a model object. We decode each line of the output on the next slide.</a:t>
             </a:r>
           </a:p>
         </p:txBody>
@@ -10240,7 +10194,7 @@
             </a:r>
             <a:r>
               <a:rPr/>
-              <a:t> is the difference in means we could expect to see if we repeated this study many times.</a:t>
+              <a:t> is the range we could expect to see if we repeated this study many times.</a:t>
             </a:r>
           </a:p>
         </p:txBody>
@@ -10331,6 +10285,26 @@
             <a:r>
               <a:rPr>
                 <a:solidFill>
+                  <a:srgbClr val="5E5E5E"/>
+                </a:solidFill>
+                <a:latin typeface="Courier"/>
+              </a:rPr>
+              <a:t># if/else: R checks the condition and runs one of two blocks</a:t>
+            </a:r>
+            <a:br/>
+            <a:r>
+              <a:rPr>
+                <a:solidFill>
+                  <a:srgbClr val="5E5E5E"/>
+                </a:solidFill>
+                <a:latin typeface="Courier"/>
+              </a:rPr>
+              <a:t># We will learn these formally in the functions lecture</a:t>
+            </a:r>
+            <a:br/>
+            <a:r>
+              <a:rPr>
+                <a:solidFill>
                   <a:srgbClr val="003B4F"/>
                 </a:solidFill>
                 <a:latin typeface="Courier"/>
@@ -11176,37 +11150,51 @@
             <a:pPr lvl="0"/>
             <a:r>
               <a:rPr b="1"/>
-              <a:t>Loaded</a:t>
+              <a:t>Wrangling</a:t>
             </a:r>
             <a:r>
               <a:rPr/>
-              <a:t> our leaf Excel file with </a:t>
-            </a:r>
-            <a:r>
-              <a:rPr>
-                <a:latin typeface="Courier"/>
-              </a:rPr>
-              <a:t>read_excel()</a:t>
+              <a:t> — </a:t>
+            </a:r>
+            <a:r>
+              <a:rPr>
+                <a:latin typeface="Courier"/>
+              </a:rPr>
+              <a:t>filter()</a:t>
             </a:r>
             <a:r>
               <a:rPr/>
-              <a:t>; inspected with </a:t>
-            </a:r>
-            <a:r>
-              <a:rPr>
-                <a:latin typeface="Courier"/>
-              </a:rPr>
-              <a:t>head()</a:t>
+              <a:t>, </a:t>
+            </a:r>
+            <a:r>
+              <a:rPr>
+                <a:latin typeface="Courier"/>
+              </a:rPr>
+              <a:t>select()</a:t>
             </a:r>
             <a:r>
               <a:rPr/>
-              <a:t> and </a:t>
-            </a:r>
-            <a:r>
-              <a:rPr>
-                <a:latin typeface="Courier"/>
-              </a:rPr>
-              <a:t>glimpse()</a:t>
+              <a:t>, </a:t>
+            </a:r>
+            <a:r>
+              <a:rPr>
+                <a:latin typeface="Courier"/>
+              </a:rPr>
+              <a:t>mutate()</a:t>
+            </a:r>
+            <a:r>
+              <a:rPr/>
+              <a:t>, </a:t>
+            </a:r>
+            <a:r>
+              <a:rPr>
+                <a:latin typeface="Courier"/>
+              </a:rPr>
+              <a:t>arrange()</a:t>
+            </a:r>
+            <a:r>
+              <a:rPr/>
+              <a:t> as the core tidyverse verbs</a:t>
             </a:r>
           </a:p>
           <a:p>
@@ -12474,7 +12462,7 @@
             </a:r>
             <a:r>
               <a:rPr/>
-              <a:t> shows t and p from the model object</a:t>
+              <a:t> pulls t and p directly from the model object</a:t>
             </a:r>
           </a:p>
           <a:p>
@@ -12506,7 +12494,7 @@
             </a:pPr>
             <a:r>
               <a:rPr sz="2000"/>
-              <a:t>Embedding test statistics in the plot title or subtitle saves you from copying numbers by hand — and avoids typos in your report.</a:t>
+              <a:t>Embedding test statistics in the plot subtitle saves you from copying numbers by hand — and avoids typos in your report.</a:t>
             </a:r>
           </a:p>
         </p:txBody>
@@ -13876,7 +13864,7 @@
             <a:pPr lvl="0"/>
             <a:r>
               <a:rPr/>
-              <a:t>Non-overlapping bars suggest a significant difference (but overlapping bars do NOT necessarily mean no significance!)</a:t>
+              <a:t>Non-overlapping bars suggest a significant difference</a:t>
             </a:r>
           </a:p>
           <a:p>
@@ -13902,16 +13890,7 @@
             </a:r>
             <a:r>
               <a:rPr/>
-              <a:t> significant at α = 0.05.</a:t>
-            </a:r>
-          </a:p>
-          <a:p>
-            <a:pPr lvl="0" indent="0" marL="0">
-              <a:buNone/>
-            </a:pPr>
-            <a:r>
-              <a:rPr/>
-              <a:t>The </a:t>
+              <a:t> significant at α = 0.05. The </a:t>
             </a:r>
             <a:r>
               <a:rPr i="1"/>
@@ -14199,170 +14178,6 @@
               <a:t>)</a:t>
             </a:r>
             <a:br/>
-            <a:r>
-              <a:rPr>
-                <a:solidFill>
-                  <a:srgbClr val="003B4F"/>
-                </a:solidFill>
-                <a:latin typeface="Courier"/>
-              </a:rPr>
-              <a:t>ci_lo  &lt;- </a:t>
-            </a:r>
-            <a:r>
-              <a:rPr>
-                <a:solidFill>
-                  <a:srgbClr val="4758AB"/>
-                </a:solidFill>
-                <a:latin typeface="Courier"/>
-              </a:rPr>
-              <a:t>round</a:t>
-            </a:r>
-            <a:r>
-              <a:rPr>
-                <a:solidFill>
-                  <a:srgbClr val="003B4F"/>
-                </a:solidFill>
-                <a:latin typeface="Courier"/>
-              </a:rPr>
-              <a:t>(leaf_ttest_model</a:t>
-            </a:r>
-            <a:r>
-              <a:rPr>
-                <a:solidFill>
-                  <a:srgbClr val="5E5E5E"/>
-                </a:solidFill>
-                <a:latin typeface="Courier"/>
-              </a:rPr>
-              <a:t>$</a:t>
-            </a:r>
-            <a:r>
-              <a:rPr>
-                <a:solidFill>
-                  <a:srgbClr val="003B4F"/>
-                </a:solidFill>
-                <a:latin typeface="Courier"/>
-              </a:rPr>
-              <a:t>conf.int[</a:t>
-            </a:r>
-            <a:r>
-              <a:rPr>
-                <a:solidFill>
-                  <a:srgbClr val="AD0000"/>
-                </a:solidFill>
-                <a:latin typeface="Courier"/>
-              </a:rPr>
-              <a:t>1</a:t>
-            </a:r>
-            <a:r>
-              <a:rPr>
-                <a:solidFill>
-                  <a:srgbClr val="003B4F"/>
-                </a:solidFill>
-                <a:latin typeface="Courier"/>
-              </a:rPr>
-              <a:t>], </a:t>
-            </a:r>
-            <a:r>
-              <a:rPr>
-                <a:solidFill>
-                  <a:srgbClr val="AD0000"/>
-                </a:solidFill>
-                <a:latin typeface="Courier"/>
-              </a:rPr>
-              <a:t>2</a:t>
-            </a:r>
-            <a:r>
-              <a:rPr>
-                <a:solidFill>
-                  <a:srgbClr val="003B4F"/>
-                </a:solidFill>
-                <a:latin typeface="Courier"/>
-              </a:rPr>
-              <a:t>)</a:t>
-            </a:r>
-            <a:br/>
-            <a:r>
-              <a:rPr>
-                <a:solidFill>
-                  <a:srgbClr val="003B4F"/>
-                </a:solidFill>
-                <a:latin typeface="Courier"/>
-              </a:rPr>
-              <a:t>ci_hi  &lt;- </a:t>
-            </a:r>
-            <a:r>
-              <a:rPr>
-                <a:solidFill>
-                  <a:srgbClr val="4758AB"/>
-                </a:solidFill>
-                <a:latin typeface="Courier"/>
-              </a:rPr>
-              <a:t>round</a:t>
-            </a:r>
-            <a:r>
-              <a:rPr>
-                <a:solidFill>
-                  <a:srgbClr val="003B4F"/>
-                </a:solidFill>
-                <a:latin typeface="Courier"/>
-              </a:rPr>
-              <a:t>(leaf_ttest_model</a:t>
-            </a:r>
-            <a:r>
-              <a:rPr>
-                <a:solidFill>
-                  <a:srgbClr val="5E5E5E"/>
-                </a:solidFill>
-                <a:latin typeface="Courier"/>
-              </a:rPr>
-              <a:t>$</a:t>
-            </a:r>
-            <a:r>
-              <a:rPr>
-                <a:solidFill>
-                  <a:srgbClr val="003B4F"/>
-                </a:solidFill>
-                <a:latin typeface="Courier"/>
-              </a:rPr>
-              <a:t>conf.int[</a:t>
-            </a:r>
-            <a:r>
-              <a:rPr>
-                <a:solidFill>
-                  <a:srgbClr val="AD0000"/>
-                </a:solidFill>
-                <a:latin typeface="Courier"/>
-              </a:rPr>
-              <a:t>2</a:t>
-            </a:r>
-            <a:r>
-              <a:rPr>
-                <a:solidFill>
-                  <a:srgbClr val="003B4F"/>
-                </a:solidFill>
-                <a:latin typeface="Courier"/>
-              </a:rPr>
-              <a:t>], </a:t>
-            </a:r>
-            <a:r>
-              <a:rPr>
-                <a:solidFill>
-                  <a:srgbClr val="AD0000"/>
-                </a:solidFill>
-                <a:latin typeface="Courier"/>
-              </a:rPr>
-              <a:t>2</a:t>
-            </a:r>
-            <a:r>
-              <a:rPr>
-                <a:solidFill>
-                  <a:srgbClr val="003B4F"/>
-                </a:solidFill>
-                <a:latin typeface="Courier"/>
-              </a:rPr>
-              <a:t>)</a:t>
-            </a:r>
-            <a:br/>
             <a:br/>
             <a:r>
               <a:rPr>
@@ -15480,7 +15295,7 @@
                 </a:solidFill>
                 <a:latin typeface="Courier"/>
               </a:rPr>
-              <a:t>plot =</a:t>
+              <a:t>plot   =</a:t>
             </a:r>
             <a:r>
               <a:rPr>
@@ -15508,7 +15323,7 @@
                 </a:solidFill>
                 <a:latin typeface="Courier"/>
               </a:rPr>
-              <a:t>width =</a:t>
+              <a:t>width  =</a:t>
             </a:r>
             <a:r>
               <a:rPr>
@@ -15700,7 +15515,7 @@
                 </a:solidFill>
                 <a:latin typeface="Courier"/>
               </a:rPr>
-              <a:t>plot =</a:t>
+              <a:t>plot   =</a:t>
             </a:r>
             <a:r>
               <a:rPr>
@@ -15728,7 +15543,7 @@
                 </a:solidFill>
                 <a:latin typeface="Courier"/>
               </a:rPr>
-              <a:t>width =</a:t>
+              <a:t>width  =</a:t>
             </a:r>
             <a:r>
               <a:rPr>
@@ -16165,10 +15980,6 @@
               </a:rPr>
               <a:t>t.test(y ~ group, data, var.equal = FALSE, alternative = "two.sided")</a:t>
             </a:r>
-            <a:r>
-              <a:rPr/>
-              <a:t> — the test</a:t>
-            </a:r>
           </a:p>
           <a:p>
             <a:pPr lvl="0"/>
@@ -16206,18 +16017,14 @@
           <a:p>
             <a:pPr lvl="0"/>
             <a:r>
+              <a:rPr>
+                <a:latin typeface="Courier"/>
+              </a:rPr>
+              <a:t>paste0(...)</a:t>
+            </a:r>
+            <a:r>
               <a:rPr/>
-              <a:t>Embedding results in </a:t>
-            </a:r>
-            <a:r>
-              <a:rPr>
-                <a:latin typeface="Courier"/>
-              </a:rPr>
-              <a:t>subtitle = paste0(...)</a:t>
-            </a:r>
-            <a:r>
-              <a:rPr/>
-              <a:t> — reproducible figure labels</a:t>
+              <a:t> in subtitle — embed test statistics in figures</a:t>
             </a:r>
           </a:p>
         </p:txBody>
@@ -16305,21 +16112,27 @@
             <a:pPr lvl="0"/>
             <a:r>
               <a:rPr/>
-              <a:t>More than two groups? → ANOVA</a:t>
+              <a:t>Linear regression — predicting leaf area from paper tracing mass</a:t>
             </a:r>
           </a:p>
           <a:p>
             <a:pPr lvl="0"/>
             <a:r>
               <a:rPr/>
-              <a:t>Checking ANOVA assumptions</a:t>
+              <a:t>Building a calibration curve with </a:t>
+            </a:r>
+            <a:r>
+              <a:rPr>
+                <a:latin typeface="Courier"/>
+              </a:rPr>
+              <a:t>lm()</a:t>
             </a:r>
           </a:p>
           <a:p>
             <a:pPr lvl="0"/>
             <a:r>
               <a:rPr/>
-              <a:t>Post-hoc tests (which groups differ?)</a:t>
+              <a:t>R², residuals, and assumption checking</a:t>
             </a:r>
           </a:p>
         </p:txBody>
@@ -16856,16 +16669,6 @@
               </a:rPr>
               <a:t>(</a:t>
             </a:r>
-            <a:br/>
-            <a:r>
-              <a:rPr>
-                <a:solidFill>
-                  <a:srgbClr val="003B4F"/>
-                </a:solidFill>
-                <a:latin typeface="Courier"/>
-              </a:rPr>
-              <a:t>  </a:t>
-            </a:r>
             <a:r>
               <a:rPr>
                 <a:solidFill>
@@ -16875,7 +16678,6 @@
               </a:rPr>
               <a:t>"data/2026_06_25_tree_experiment_raw_data.xlsx"</a:t>
             </a:r>
-            <a:br/>
             <a:r>
               <a:rPr>
                 <a:solidFill>
@@ -16917,7 +16719,7 @@
             </a:r>
             <a:r>
               <a:rPr sz="2000"/>
-              <a:t>, which we will use to check whether our two groups have similar variance.</a:t>
+              <a:t>, which we use to check whether our two groups have similar variance.</a:t>
             </a:r>
           </a:p>
           <a:p>
@@ -19075,7 +18877,7 @@
             </a:r>
             <a:r>
               <a:rPr/>
-              <a:t> equal: almost identical result to standard t-test — minimal loss of power</a:t>
+              <a:t> equal: almost identical result — minimal loss of power</a:t>
             </a:r>
           </a:p>
           <a:p>
@@ -19139,15 +18941,15 @@
             </a:r>
           </a:p>
           <a:p>
-            <a:pPr lvl="0" indent="0" marL="0">
+            <a:pPr lvl="0" indent="0" marL="1270000">
               <a:buNone/>
             </a:pPr>
             <a:r>
-              <a:rPr/>
+              <a:rPr sz="2000"/>
               <a:t>In R: </a:t>
             </a:r>
             <a:r>
-              <a:rPr>
+              <a:rPr sz="2000">
                 <a:latin typeface="Courier"/>
               </a:rPr>
               <a:t>var.equal = FALSE</a:t>

--- a/docs/lectures/lecture_04/04_lecture_powerpoint.pptx
+++ b/docs/lectures/lecture_04/04_lecture_powerpoint.pptx
@@ -3364,7 +3364,7 @@
             </a:pPr>
             <a:r>
               <a:rPr/>
-              <a:t>2026-06-28</a:t>
+              <a:t>2026-06-30</a:t>
             </a:r>
           </a:p>
         </p:txBody>
@@ -5218,7 +5218,7 @@
                       </a:r>
                       <a:r>
                         <a:rPr/>
-                        <a:t> — histogram</a:t>
+                        <a:t> — histogram/box plot</a:t>
                       </a:r>
                     </a:p>
                   </a:txBody>
@@ -8631,8 +8631,8 @@
                 <a:tableStyleId>{5C22544A-7EE6-4342-B048-85BDC9FD1C3A}</a:tableStyleId>
               </a:tblPr>
               <a:tblGrid>
-                <a:gridCol w="2019300"/>
-                <a:gridCol w="2019300"/>
+                <a:gridCol w="1587500"/>
+                <a:gridCol w="2451100"/>
               </a:tblGrid>
               <a:tr h="0">
                 <a:tc>
@@ -9955,8 +9955,8 @@
                 <a:tableStyleId>{5C22544A-7EE6-4342-B048-85BDC9FD1C3A}</a:tableStyleId>
               </a:tblPr>
               <a:tblGrid>
-                <a:gridCol w="2019300"/>
-                <a:gridCol w="2019300"/>
+                <a:gridCol w="1270000"/>
+                <a:gridCol w="2768600"/>
               </a:tblGrid>
               <a:tr h="0">
                 <a:tc>
@@ -16709,7 +16709,31 @@
             </a:r>
             <a:r>
               <a:rPr sz="2000"/>
-              <a:t> is the Companion to Applied Regression package. It contains </a:t>
+              <a:t> is the </a:t>
+            </a:r>
+            <a:r>
+              <a:rPr sz="2000" b="1"/>
+              <a:t>C</a:t>
+            </a:r>
+            <a:r>
+              <a:rPr sz="2000"/>
+              <a:t>ompanion to </a:t>
+            </a:r>
+            <a:r>
+              <a:rPr sz="2000" b="1"/>
+              <a:t>A</a:t>
+            </a:r>
+            <a:r>
+              <a:rPr sz="2000"/>
+              <a:t>pplied </a:t>
+            </a:r>
+            <a:r>
+              <a:rPr sz="2000" b="1"/>
+              <a:t>R</a:t>
+            </a:r>
+            <a:r>
+              <a:rPr sz="2000"/>
+              <a:t>egression package. It contains </a:t>
             </a:r>
             <a:r>
               <a:rPr sz="2000">
@@ -17370,6 +17394,13 @@
             <a:pPr lvl="0"/>
             <a:r>
               <a:rPr/>
+              <a:t>RESULTS:</a:t>
+            </a:r>
+          </a:p>
+          <a:p>
+            <a:pPr lvl="1"/>
+            <a:r>
+              <a:rPr/>
               <a:t>Shady mean: </a:t>
             </a:r>
             <a:r>
@@ -17378,7 +17409,7 @@
             </a:r>
           </a:p>
           <a:p>
-            <a:pPr lvl="0"/>
+            <a:pPr lvl="1"/>
             <a:r>
               <a:rPr/>
               <a:t>Sunny mean: </a:t>
@@ -17389,7 +17420,7 @@
             </a:r>
           </a:p>
           <a:p>
-            <a:pPr lvl="0"/>
+            <a:pPr lvl="1"/>
             <a:r>
               <a:rPr/>
               <a:t>Difference: </a:t>
@@ -17404,21 +17435,24 @@
             </a:r>
           </a:p>
           <a:p>
-            <a:pPr lvl="0" indent="0" marL="0">
-              <a:buNone/>
-            </a:pPr>
+            <a:pPr lvl="0"/>
             <a:r>
               <a:rPr b="1"/>
               <a:t>But is that gap real, or could it just be sampling noise?</a:t>
             </a:r>
           </a:p>
           <a:p>
-            <a:pPr lvl="0" indent="0" marL="0">
-              <a:buNone/>
-            </a:pPr>
+            <a:pPr lvl="0"/>
             <a:r>
               <a:rPr/>
-              <a:t>With only n = 10 per group, random chance could produce apparent differences. We need a formal test to quantify the probability.</a:t>
+              <a:t>With only n = 10 per group, random chance could produce apparent differences.</a:t>
+            </a:r>
+          </a:p>
+          <a:p>
+            <a:pPr lvl="0"/>
+            <a:r>
+              <a:rPr b="1"/>
+              <a:t>We need a formal test to quantify the probability.</a:t>
             </a:r>
           </a:p>
         </p:txBody>
@@ -18906,7 +18940,7 @@
           <a:p>
             <a:pPr lvl="0"/>
             <a:r>
-              <a:rPr/>
+              <a:rPr b="1"/>
               <a:t>Welch’s protects you either way</a:t>
             </a:r>
           </a:p>
@@ -18949,7 +18983,7 @@
               <a:t>In R: </a:t>
             </a:r>
             <a:r>
-              <a:rPr sz="2000">
+              <a:rPr sz="2000" b="1">
                 <a:latin typeface="Courier"/>
               </a:rPr>
               <a:t>var.equal = FALSE</a:t>
